--- a/Projectmunka.pptx
+++ b/Projectmunka.pptx
@@ -17497,13 +17497,13 @@
           <p:nvPr>
             <p:extLst>
               <p:ext uri="{D42A27DB-BD31-4B8C-83A1-F6EECF244321}">
-                <p14:modId xmlns:p14="http://schemas.microsoft.com/office/powerpoint/2010/main" val="2531755674"/>
+                <p14:modId xmlns:p14="http://schemas.microsoft.com/office/powerpoint/2010/main" val="2002850837"/>
               </p:ext>
             </p:extLst>
           </p:nvPr>
         </p:nvGraphicFramePr>
         <p:xfrm>
-          <a:off x="3551263" y="499380"/>
+          <a:off x="3655481" y="446732"/>
           <a:ext cx="10296778" cy="7726052"/>
         </p:xfrm>
         <a:graphic>
@@ -17562,7 +17562,7 @@
                     <a:bodyPr/>
                     <a:lstStyle/>
                     <a:p>
-                      <a:pPr algn="l" fontAlgn="b"/>
+                      <a:pPr algn="ctr" fontAlgn="b"/>
                       <a:r>
                         <a:rPr lang="en-US" sz="1400" b="0" i="0" u="none" strike="noStrike" dirty="0">
                           <a:solidFill>
@@ -17626,7 +17626,7 @@
                     <a:bodyPr/>
                     <a:lstStyle/>
                     <a:p>
-                      <a:pPr algn="l" fontAlgn="b"/>
+                      <a:pPr algn="ctr" fontAlgn="b"/>
                       <a:r>
                         <a:rPr lang="en-US" sz="1400" b="0" u="none" strike="noStrike" dirty="0" err="1">
                           <a:solidFill>
@@ -17690,7 +17690,7 @@
                     <a:bodyPr/>
                     <a:lstStyle/>
                     <a:p>
-                      <a:pPr algn="l" fontAlgn="b"/>
+                      <a:pPr algn="ctr" fontAlgn="b"/>
                       <a:r>
                         <a:rPr lang="hu-HU" sz="1400" b="0" u="none" strike="noStrike" dirty="0" err="1">
                           <a:solidFill>
@@ -17948,7 +17948,7 @@
                 </a:extLst>
               </a:tr>
               <a:tr h="0">
-                <a:tc rowSpan="21">
+                <a:tc rowSpan="19">
                   <a:txBody>
                     <a:bodyPr/>
                     <a:lstStyle/>
@@ -19079,7 +19079,7 @@
                           <a:effectLst/>
                           <a:latin typeface="Instrument Sans Medium" panose="020B0604020202020204" charset="0"/>
                         </a:rPr>
-                        <a:t>192.168.88.1/24</a:t>
+                        <a:t>192.168.88.1/27</a:t>
                       </a:r>
                       <a:endParaRPr lang="hu-HU" sz="1400" b="0" i="0" u="none" strike="noStrike" dirty="0">
                         <a:solidFill>
@@ -19143,7 +19143,7 @@
                           <a:effectLst/>
                           <a:latin typeface="Instrument Sans Medium" panose="020B0604020202020204" charset="0"/>
                         </a:rPr>
-                        <a:t>2001:DB8:88::1/64</a:t>
+                        <a:t>2001:DB8:30:88::1/64</a:t>
                       </a:r>
                       <a:endParaRPr lang="hu-HU" sz="1400" b="0" i="0" u="none" strike="noStrike" dirty="0">
                         <a:solidFill>
@@ -19765,6 +19765,9 @@
                       <a:headEnd type="none" w="med" len="med"/>
                       <a:tailEnd type="none" w="med" len="med"/>
                     </a:lnB>
+                    <a:solidFill>
+                      <a:schemeClr val="accent6"/>
+                    </a:solidFill>
                   </a:tcPr>
                 </a:tc>
                 <a:tc>
@@ -20036,7 +20039,76 @@
                           <a:effectLst/>
                           <a:latin typeface="Instrument Sans Medium" panose="020B0604020202020204" charset="0"/>
                         </a:rPr>
-                        <a:t>10.0.2.5/30</a:t>
+                        <a:t>10.0.2.1/30</a:t>
+                      </a:r>
+                      <a:endParaRPr lang="hu-HU" sz="1400" b="0" i="0" u="none" strike="noStrike" dirty="0">
+                        <a:solidFill>
+                          <a:srgbClr val="FFFFFF"/>
+                        </a:solidFill>
+                        <a:effectLst/>
+                        <a:latin typeface="Instrument Sans Medium" panose="020B0604020202020204" charset="0"/>
+                      </a:endParaRPr>
+                    </a:p>
+                  </a:txBody>
+                  <a:tcPr marL="7034" marR="7034" marT="7034" marB="33765" anchor="b">
+                    <a:lnL w="12700" cap="flat" cmpd="sng" algn="ctr">
+                      <a:solidFill>
+                        <a:schemeClr val="tx1"/>
+                      </a:solidFill>
+                      <a:prstDash val="solid"/>
+                      <a:round/>
+                      <a:headEnd type="none" w="med" len="med"/>
+                      <a:tailEnd type="none" w="med" len="med"/>
+                    </a:lnL>
+                    <a:lnR w="12700" cap="flat" cmpd="sng" algn="ctr">
+                      <a:solidFill>
+                        <a:schemeClr val="tx1"/>
+                      </a:solidFill>
+                      <a:prstDash val="solid"/>
+                      <a:round/>
+                      <a:headEnd type="none" w="med" len="med"/>
+                      <a:tailEnd type="none" w="med" len="med"/>
+                    </a:lnR>
+                    <a:lnT w="12700" cap="flat" cmpd="sng" algn="ctr">
+                      <a:solidFill>
+                        <a:schemeClr val="tx1"/>
+                      </a:solidFill>
+                      <a:prstDash val="solid"/>
+                      <a:round/>
+                      <a:headEnd type="none" w="med" len="med"/>
+                      <a:tailEnd type="none" w="med" len="med"/>
+                    </a:lnT>
+                    <a:lnB w="12700" cap="flat" cmpd="sng" algn="ctr">
+                      <a:solidFill>
+                        <a:schemeClr val="tx1"/>
+                      </a:solidFill>
+                      <a:prstDash val="solid"/>
+                      <a:round/>
+                      <a:headEnd type="none" w="med" len="med"/>
+                      <a:tailEnd type="none" w="med" len="med"/>
+                    </a:lnB>
+                    <a:solidFill>
+                      <a:schemeClr val="accent2">
+                        <a:lumMod val="75000"/>
+                      </a:schemeClr>
+                    </a:solidFill>
+                  </a:tcPr>
+                </a:tc>
+                <a:tc>
+                  <a:txBody>
+                    <a:bodyPr/>
+                    <a:lstStyle/>
+                    <a:p>
+                      <a:pPr algn="ctr" fontAlgn="b"/>
+                      <a:r>
+                        <a:rPr lang="en-US" sz="1400" b="0" i="0" u="none" strike="noStrike" dirty="0">
+                          <a:solidFill>
+                            <a:srgbClr val="FFFFFF"/>
+                          </a:solidFill>
+                          <a:effectLst/>
+                          <a:latin typeface="Instrument Sans Medium" panose="020B0604020202020204" charset="0"/>
+                        </a:rPr>
+                        <a:t>-</a:t>
                       </a:r>
                       <a:endParaRPr lang="hu-HU" sz="1400" b="0" i="0" u="none" strike="noStrike" dirty="0">
                         <a:solidFill>
@@ -20150,70 +20222,6 @@
                     </a:lnB>
                   </a:tcPr>
                 </a:tc>
-                <a:tc>
-                  <a:txBody>
-                    <a:bodyPr/>
-                    <a:lstStyle/>
-                    <a:p>
-                      <a:pPr algn="ctr" fontAlgn="b"/>
-                      <a:r>
-                        <a:rPr lang="en-US" sz="1400" b="0" i="0" u="none" strike="noStrike" dirty="0">
-                          <a:solidFill>
-                            <a:srgbClr val="FFFFFF"/>
-                          </a:solidFill>
-                          <a:effectLst/>
-                          <a:latin typeface="Instrument Sans Medium" panose="020B0604020202020204" charset="0"/>
-                        </a:rPr>
-                        <a:t>-</a:t>
-                      </a:r>
-                      <a:endParaRPr lang="hu-HU" sz="1400" b="0" i="0" u="none" strike="noStrike" dirty="0">
-                        <a:solidFill>
-                          <a:srgbClr val="FFFFFF"/>
-                        </a:solidFill>
-                        <a:effectLst/>
-                        <a:latin typeface="Instrument Sans Medium" panose="020B0604020202020204" charset="0"/>
-                      </a:endParaRPr>
-                    </a:p>
-                  </a:txBody>
-                  <a:tcPr marL="7034" marR="7034" marT="7034" marB="33765" anchor="b">
-                    <a:lnL w="12700" cap="flat" cmpd="sng" algn="ctr">
-                      <a:solidFill>
-                        <a:schemeClr val="tx1"/>
-                      </a:solidFill>
-                      <a:prstDash val="solid"/>
-                      <a:round/>
-                      <a:headEnd type="none" w="med" len="med"/>
-                      <a:tailEnd type="none" w="med" len="med"/>
-                    </a:lnL>
-                    <a:lnR w="12700" cap="flat" cmpd="sng" algn="ctr">
-                      <a:solidFill>
-                        <a:schemeClr val="tx1"/>
-                      </a:solidFill>
-                      <a:prstDash val="solid"/>
-                      <a:round/>
-                      <a:headEnd type="none" w="med" len="med"/>
-                      <a:tailEnd type="none" w="med" len="med"/>
-                    </a:lnR>
-                    <a:lnT w="12700" cap="flat" cmpd="sng" algn="ctr">
-                      <a:solidFill>
-                        <a:schemeClr val="tx1"/>
-                      </a:solidFill>
-                      <a:prstDash val="solid"/>
-                      <a:round/>
-                      <a:headEnd type="none" w="med" len="med"/>
-                      <a:tailEnd type="none" w="med" len="med"/>
-                    </a:lnT>
-                    <a:lnB w="12700" cap="flat" cmpd="sng" algn="ctr">
-                      <a:solidFill>
-                        <a:schemeClr val="tx1"/>
-                      </a:solidFill>
-                      <a:prstDash val="solid"/>
-                      <a:round/>
-                      <a:headEnd type="none" w="med" len="med"/>
-                      <a:tailEnd type="none" w="med" len="med"/>
-                    </a:lnB>
-                  </a:tcPr>
-                </a:tc>
                 <a:extLst>
                   <a:ext uri="{0D108BD9-81ED-4DB2-BD59-A6C34878D82A}">
                     <a16:rowId xmlns:a16="http://schemas.microsoft.com/office/drawing/2014/main" val="3483640270"/>
@@ -20278,7 +20286,7 @@
                     </a:lnB>
                   </a:tcPr>
                 </a:tc>
-                <a:tc rowSpan="7">
+                <a:tc rowSpan="5">
                   <a:txBody>
                     <a:bodyPr/>
                     <a:lstStyle/>
@@ -21351,7 +21359,7 @@
                           <a:effectLst/>
                           <a:latin typeface="Instrument Sans Medium" panose="020B0604020202020204" charset="0"/>
                         </a:rPr>
-                        <a:t>192.168.88.2/24</a:t>
+                        <a:t>192.168.88.2/27</a:t>
                       </a:r>
                       <a:endParaRPr lang="hu-HU" sz="1400" b="0" i="0" u="none" strike="noStrike" dirty="0">
                         <a:solidFill>
@@ -21415,7 +21423,7 @@
                           <a:effectLst/>
                           <a:latin typeface="Instrument Sans Medium" panose="020B0604020202020204" charset="0"/>
                         </a:rPr>
-                        <a:t>2001:DB8:88::2/64</a:t>
+                        <a:t>2001:DB8:30:88::2/64</a:t>
                       </a:r>
                       <a:endParaRPr lang="hu-HU" sz="1400" b="0" i="0" u="none" strike="noStrike" dirty="0">
                         <a:solidFill>
@@ -21854,51 +21862,113 @@
                   </a:ext>
                 </a:extLst>
               </a:tr>
-              <a:tr h="189759">
+              <a:tr h="142320">
                 <a:tc vMerge="1">
                   <a:txBody>
                     <a:bodyPr/>
                     <a:lstStyle/>
                     <a:p>
-                      <a:endParaRPr lang="hu-HU"/>
+                      <a:pPr algn="ctr"/>
+                      <a:endParaRPr lang="hu-HU" sz="1400" b="0" i="0" u="none" strike="noStrike" cap="none" dirty="0">
+                        <a:solidFill>
+                          <a:srgbClr val="FFFFFF"/>
+                        </a:solidFill>
+                        <a:effectLst/>
+                        <a:latin typeface="Instrument Sans Medium" panose="020B0604020202020204" charset="0"/>
+                        <a:ea typeface="+mn-ea"/>
+                        <a:cs typeface="+mn-cs"/>
+                        <a:sym typeface="Arial"/>
+                      </a:endParaRPr>
                     </a:p>
                   </a:txBody>
-                  <a:tcPr/>
-                </a:tc>
-                <a:tc vMerge="1">
-                  <a:txBody>
-                    <a:bodyPr/>
-                    <a:lstStyle/>
-                    <a:p>
-                      <a:endParaRPr lang="hu-HU"/>
-                    </a:p>
-                  </a:txBody>
-                  <a:tcPr/>
+                  <a:tcPr anchor="ctr">
+                    <a:lnT w="38100" cap="flat" cmpd="sng" algn="ctr">
+                      <a:solidFill>
+                        <a:schemeClr val="tx1"/>
+                      </a:solidFill>
+                      <a:prstDash val="solid"/>
+                      <a:round/>
+                      <a:headEnd type="none" w="med" len="med"/>
+                      <a:tailEnd type="none" w="med" len="med"/>
+                    </a:lnT>
+                  </a:tcPr>
                 </a:tc>
                 <a:tc>
                   <a:txBody>
                     <a:bodyPr/>
                     <a:lstStyle/>
                     <a:p>
-                      <a:pPr marL="0" marR="0" lvl="0" indent="0" algn="l" defTabSz="914400" rtl="0" eaLnBrk="1" fontAlgn="b" latinLnBrk="0" hangingPunct="1">
-                        <a:lnSpc>
-                          <a:spcPct val="100000"/>
-                        </a:lnSpc>
-                        <a:spcBef>
-                          <a:spcPts val="0"/>
-                        </a:spcBef>
-                        <a:spcAft>
-                          <a:spcPts val="0"/>
-                        </a:spcAft>
-                        <a:buClr>
-                          <a:srgbClr val="000000"/>
-                        </a:buClr>
-                        <a:buSzTx/>
-                        <a:buFont typeface="Arial"/>
-                        <a:buNone/>
-                        <a:tabLst/>
-                        <a:defRPr/>
-                      </a:pPr>
+                      <a:pPr algn="ctr"/>
+                      <a:r>
+                        <a:rPr lang="en-US" sz="1400" b="0" i="0" u="none" strike="noStrike" cap="none" dirty="0">
+                          <a:solidFill>
+                            <a:srgbClr val="FFFFFF"/>
+                          </a:solidFill>
+                          <a:effectLst/>
+                          <a:latin typeface="Instrument Sans Medium" panose="020B0604020202020204" charset="0"/>
+                          <a:ea typeface="+mn-ea"/>
+                          <a:cs typeface="+mn-cs"/>
+                          <a:sym typeface="Arial"/>
+                        </a:rPr>
+                        <a:t>Asa1</a:t>
+                      </a:r>
+                      <a:endParaRPr lang="hu-HU" sz="1400" b="0" i="0" u="none" strike="noStrike" cap="none" dirty="0">
+                        <a:solidFill>
+                          <a:srgbClr val="FFFFFF"/>
+                        </a:solidFill>
+                        <a:effectLst/>
+                        <a:latin typeface="Instrument Sans Medium" panose="020B0604020202020204" charset="0"/>
+                        <a:ea typeface="+mn-ea"/>
+                        <a:cs typeface="+mn-cs"/>
+                        <a:sym typeface="Arial"/>
+                      </a:endParaRPr>
+                    </a:p>
+                  </a:txBody>
+                  <a:tcPr anchor="ctr">
+                    <a:lnL w="12700" cap="flat" cmpd="sng" algn="ctr">
+                      <a:solidFill>
+                        <a:schemeClr val="tx1"/>
+                      </a:solidFill>
+                      <a:prstDash val="solid"/>
+                      <a:round/>
+                      <a:headEnd type="none" w="med" len="med"/>
+                      <a:tailEnd type="none" w="med" len="med"/>
+                    </a:lnL>
+                    <a:lnR w="12700" cap="flat" cmpd="sng" algn="ctr">
+                      <a:solidFill>
+                        <a:schemeClr val="tx1"/>
+                      </a:solidFill>
+                      <a:prstDash val="solid"/>
+                      <a:round/>
+                      <a:headEnd type="none" w="med" len="med"/>
+                      <a:tailEnd type="none" w="med" len="med"/>
+                    </a:lnR>
+                    <a:lnT w="12700" cap="flat" cmpd="sng" algn="ctr">
+                      <a:solidFill>
+                        <a:schemeClr val="tx1"/>
+                      </a:solidFill>
+                      <a:prstDash val="solid"/>
+                      <a:round/>
+                      <a:headEnd type="none" w="med" len="med"/>
+                      <a:tailEnd type="none" w="med" len="med"/>
+                    </a:lnT>
+                    <a:lnB w="12700" cap="flat" cmpd="sng" algn="ctr">
+                      <a:solidFill>
+                        <a:schemeClr val="tx1"/>
+                      </a:solidFill>
+                      <a:prstDash val="solid"/>
+                      <a:round/>
+                      <a:headEnd type="none" w="med" len="med"/>
+                      <a:tailEnd type="none" w="med" len="med"/>
+                    </a:lnB>
+                  </a:tcPr>
+                </a:tc>
+                <a:tc>
+                  <a:txBody>
+                    <a:bodyPr/>
+                    <a:lstStyle/>
+                    <a:p>
+                      <a:pPr algn="l" fontAlgn="b"/>
                       <a:r>
                         <a:rPr lang="en-US" sz="1400" b="0" i="0" u="none" strike="noStrike" dirty="0">
                           <a:solidFill>
@@ -21907,7 +21977,71 @@
                           <a:effectLst/>
                           <a:latin typeface="Instrument Sans Medium" panose="020B0604020202020204" charset="0"/>
                         </a:rPr>
-                        <a:t>Tunnel 0</a:t>
+                        <a:t>VLAN 88</a:t>
+                      </a:r>
+                      <a:endParaRPr lang="hu-HU" sz="1400" b="0" i="0" u="none" strike="noStrike" dirty="0">
+                        <a:solidFill>
+                          <a:srgbClr val="FFFFFF"/>
+                        </a:solidFill>
+                        <a:effectLst/>
+                        <a:latin typeface="Instrument Sans Medium" panose="020B0604020202020204" charset="0"/>
+                      </a:endParaRPr>
+                    </a:p>
+                  </a:txBody>
+                  <a:tcPr marL="7034" marR="7034" marT="7034" marB="33765" anchor="b">
+                    <a:lnL w="12700" cap="flat" cmpd="sng" algn="ctr">
+                      <a:solidFill>
+                        <a:schemeClr val="tx1"/>
+                      </a:solidFill>
+                      <a:prstDash val="solid"/>
+                      <a:round/>
+                      <a:headEnd type="none" w="med" len="med"/>
+                      <a:tailEnd type="none" w="med" len="med"/>
+                    </a:lnL>
+                    <a:lnR w="12700" cap="flat" cmpd="sng" algn="ctr">
+                      <a:solidFill>
+                        <a:schemeClr val="tx1"/>
+                      </a:solidFill>
+                      <a:prstDash val="solid"/>
+                      <a:round/>
+                      <a:headEnd type="none" w="med" len="med"/>
+                      <a:tailEnd type="none" w="med" len="med"/>
+                    </a:lnR>
+                    <a:lnT w="12700" cap="flat" cmpd="sng" algn="ctr">
+                      <a:solidFill>
+                        <a:schemeClr val="tx1"/>
+                      </a:solidFill>
+                      <a:prstDash val="solid"/>
+                      <a:round/>
+                      <a:headEnd type="none" w="med" len="med"/>
+                      <a:tailEnd type="none" w="med" len="med"/>
+                    </a:lnT>
+                    <a:lnB w="12700" cap="flat" cmpd="sng" algn="ctr">
+                      <a:solidFill>
+                        <a:schemeClr val="tx1"/>
+                      </a:solidFill>
+                      <a:prstDash val="solid"/>
+                      <a:round/>
+                      <a:headEnd type="none" w="med" len="med"/>
+                      <a:tailEnd type="none" w="med" len="med"/>
+                    </a:lnB>
+                  </a:tcPr>
+                </a:tc>
+                <a:tc>
+                  <a:txBody>
+                    <a:bodyPr/>
+                    <a:lstStyle/>
+                    <a:p>
+                      <a:pPr algn="l" fontAlgn="b"/>
+                      <a:r>
+                        <a:rPr lang="en-US" sz="1400" b="0" i="0" u="none" strike="noStrike" dirty="0">
+                          <a:solidFill>
+                            <a:srgbClr val="FFFFFF"/>
+                          </a:solidFill>
+                          <a:effectLst/>
+                          <a:latin typeface="Instrument Sans Medium" panose="020B0604020202020204" charset="0"/>
+                        </a:rPr>
+                        <a:t>192.168.88.3/27</a:t>
                       </a:r>
                       <a:endParaRPr lang="hu-HU" sz="1400" b="0" i="0" u="none" strike="noStrike" dirty="0">
                         <a:solidFill>
@@ -21989,717 +22123,7 @@
                           <a:effectLst/>
                           <a:latin typeface="Instrument Sans Medium" panose="020B0604020202020204" charset="0"/>
                         </a:rPr>
-                        <a:t>10.0.1.6/30</a:t>
-                      </a:r>
-                      <a:endParaRPr lang="hu-HU" sz="1400" b="0" i="0" u="none" strike="noStrike" dirty="0">
-                        <a:solidFill>
-                          <a:srgbClr val="FFFFFF"/>
-                        </a:solidFill>
-                        <a:effectLst/>
-                        <a:latin typeface="Instrument Sans Medium" panose="020B0604020202020204" charset="0"/>
-                      </a:endParaRPr>
-                    </a:p>
-                  </a:txBody>
-                  <a:tcPr marL="7034" marR="7034" marT="7034" marB="33765" anchor="b">
-                    <a:lnL w="12700" cap="flat" cmpd="sng" algn="ctr">
-                      <a:solidFill>
-                        <a:schemeClr val="tx1"/>
-                      </a:solidFill>
-                      <a:prstDash val="solid"/>
-                      <a:round/>
-                      <a:headEnd type="none" w="med" len="med"/>
-                      <a:tailEnd type="none" w="med" len="med"/>
-                    </a:lnL>
-                    <a:lnR w="12700" cap="flat" cmpd="sng" algn="ctr">
-                      <a:solidFill>
-                        <a:schemeClr val="tx1"/>
-                      </a:solidFill>
-                      <a:prstDash val="solid"/>
-                      <a:round/>
-                      <a:headEnd type="none" w="med" len="med"/>
-                      <a:tailEnd type="none" w="med" len="med"/>
-                    </a:lnR>
-                    <a:lnT w="12700" cap="flat" cmpd="sng" algn="ctr">
-                      <a:solidFill>
-                        <a:schemeClr val="tx1"/>
-                      </a:solidFill>
-                      <a:prstDash val="solid"/>
-                      <a:round/>
-                      <a:headEnd type="none" w="med" len="med"/>
-                      <a:tailEnd type="none" w="med" len="med"/>
-                    </a:lnT>
-                    <a:lnB w="12700" cap="flat" cmpd="sng" algn="ctr">
-                      <a:solidFill>
-                        <a:schemeClr val="tx1"/>
-                      </a:solidFill>
-                      <a:prstDash val="solid"/>
-                      <a:round/>
-                      <a:headEnd type="none" w="med" len="med"/>
-                      <a:tailEnd type="none" w="med" len="med"/>
-                    </a:lnB>
-                  </a:tcPr>
-                </a:tc>
-                <a:tc>
-                  <a:txBody>
-                    <a:bodyPr/>
-                    <a:lstStyle/>
-                    <a:p>
-                      <a:pPr algn="ctr" fontAlgn="b"/>
-                      <a:r>
-                        <a:rPr lang="en-US" sz="1400" b="0" i="0" u="none" strike="noStrike" dirty="0">
-                          <a:solidFill>
-                            <a:srgbClr val="FFFFFF"/>
-                          </a:solidFill>
-                          <a:effectLst/>
-                          <a:latin typeface="Instrument Sans Medium" panose="020B0604020202020204" charset="0"/>
-                        </a:rPr>
-                        <a:t>-</a:t>
-                      </a:r>
-                      <a:endParaRPr lang="hu-HU" sz="1400" b="0" i="0" u="none" strike="noStrike" dirty="0">
-                        <a:solidFill>
-                          <a:srgbClr val="FFFFFF"/>
-                        </a:solidFill>
-                        <a:effectLst/>
-                        <a:latin typeface="Instrument Sans Medium" panose="020B0604020202020204" charset="0"/>
-                      </a:endParaRPr>
-                    </a:p>
-                  </a:txBody>
-                  <a:tcPr marL="7034" marR="7034" marT="7034" marB="33765" anchor="b">
-                    <a:lnL w="12700" cap="flat" cmpd="sng" algn="ctr">
-                      <a:solidFill>
-                        <a:schemeClr val="tx1"/>
-                      </a:solidFill>
-                      <a:prstDash val="solid"/>
-                      <a:round/>
-                      <a:headEnd type="none" w="med" len="med"/>
-                      <a:tailEnd type="none" w="med" len="med"/>
-                    </a:lnL>
-                    <a:lnR w="12700" cap="flat" cmpd="sng" algn="ctr">
-                      <a:solidFill>
-                        <a:schemeClr val="tx1"/>
-                      </a:solidFill>
-                      <a:prstDash val="solid"/>
-                      <a:round/>
-                      <a:headEnd type="none" w="med" len="med"/>
-                      <a:tailEnd type="none" w="med" len="med"/>
-                    </a:lnR>
-                    <a:lnT w="12700" cap="flat" cmpd="sng" algn="ctr">
-                      <a:solidFill>
-                        <a:schemeClr val="tx1"/>
-                      </a:solidFill>
-                      <a:prstDash val="solid"/>
-                      <a:round/>
-                      <a:headEnd type="none" w="med" len="med"/>
-                      <a:tailEnd type="none" w="med" len="med"/>
-                    </a:lnT>
-                    <a:lnB w="12700" cap="flat" cmpd="sng" algn="ctr">
-                      <a:solidFill>
-                        <a:schemeClr val="tx1"/>
-                      </a:solidFill>
-                      <a:prstDash val="solid"/>
-                      <a:round/>
-                      <a:headEnd type="none" w="med" len="med"/>
-                      <a:tailEnd type="none" w="med" len="med"/>
-                    </a:lnB>
-                  </a:tcPr>
-                </a:tc>
-                <a:tc>
-                  <a:txBody>
-                    <a:bodyPr/>
-                    <a:lstStyle/>
-                    <a:p>
-                      <a:pPr algn="ctr" fontAlgn="b"/>
-                      <a:r>
-                        <a:rPr lang="en-US" sz="1400" b="0" i="0" u="none" strike="noStrike" dirty="0">
-                          <a:solidFill>
-                            <a:srgbClr val="FFFFFF"/>
-                          </a:solidFill>
-                          <a:effectLst/>
-                          <a:latin typeface="Instrument Sans Medium" panose="020B0604020202020204" charset="0"/>
-                        </a:rPr>
-                        <a:t>-</a:t>
-                      </a:r>
-                      <a:endParaRPr lang="hu-HU" sz="1400" b="0" i="0" u="none" strike="noStrike" dirty="0">
-                        <a:solidFill>
-                          <a:srgbClr val="FFFFFF"/>
-                        </a:solidFill>
-                        <a:effectLst/>
-                        <a:latin typeface="Instrument Sans Medium" panose="020B0604020202020204" charset="0"/>
-                      </a:endParaRPr>
-                    </a:p>
-                  </a:txBody>
-                  <a:tcPr marL="7034" marR="7034" marT="7034" marB="33765" anchor="b">
-                    <a:lnL w="12700" cap="flat" cmpd="sng" algn="ctr">
-                      <a:solidFill>
-                        <a:schemeClr val="tx1"/>
-                      </a:solidFill>
-                      <a:prstDash val="solid"/>
-                      <a:round/>
-                      <a:headEnd type="none" w="med" len="med"/>
-                      <a:tailEnd type="none" w="med" len="med"/>
-                    </a:lnL>
-                    <a:lnR w="12700" cap="flat" cmpd="sng" algn="ctr">
-                      <a:solidFill>
-                        <a:schemeClr val="tx1"/>
-                      </a:solidFill>
-                      <a:prstDash val="solid"/>
-                      <a:round/>
-                      <a:headEnd type="none" w="med" len="med"/>
-                      <a:tailEnd type="none" w="med" len="med"/>
-                    </a:lnR>
-                    <a:lnT w="12700" cap="flat" cmpd="sng" algn="ctr">
-                      <a:solidFill>
-                        <a:schemeClr val="tx1"/>
-                      </a:solidFill>
-                      <a:prstDash val="solid"/>
-                      <a:round/>
-                      <a:headEnd type="none" w="med" len="med"/>
-                      <a:tailEnd type="none" w="med" len="med"/>
-                    </a:lnT>
-                    <a:lnB w="12700" cap="flat" cmpd="sng" algn="ctr">
-                      <a:solidFill>
-                        <a:schemeClr val="tx1"/>
-                      </a:solidFill>
-                      <a:prstDash val="solid"/>
-                      <a:round/>
-                      <a:headEnd type="none" w="med" len="med"/>
-                      <a:tailEnd type="none" w="med" len="med"/>
-                    </a:lnB>
-                  </a:tcPr>
-                </a:tc>
-                <a:extLst>
-                  <a:ext uri="{0D108BD9-81ED-4DB2-BD59-A6C34878D82A}">
-                    <a16:rowId xmlns:a16="http://schemas.microsoft.com/office/drawing/2014/main" val="1791653234"/>
-                  </a:ext>
-                </a:extLst>
-              </a:tr>
-              <a:tr h="0">
-                <a:tc vMerge="1">
-                  <a:txBody>
-                    <a:bodyPr/>
-                    <a:lstStyle/>
-                    <a:p>
-                      <a:endParaRPr lang="hu-HU"/>
-                    </a:p>
-                  </a:txBody>
-                  <a:tcPr/>
-                </a:tc>
-                <a:tc vMerge="1">
-                  <a:txBody>
-                    <a:bodyPr/>
-                    <a:lstStyle/>
-                    <a:p>
-                      <a:endParaRPr lang="hu-HU"/>
-                    </a:p>
-                  </a:txBody>
-                  <a:tcPr/>
-                </a:tc>
-                <a:tc>
-                  <a:txBody>
-                    <a:bodyPr/>
-                    <a:lstStyle/>
-                    <a:p>
-                      <a:pPr marL="0" marR="0" lvl="0" indent="0" algn="l" defTabSz="914400" rtl="0" eaLnBrk="1" fontAlgn="b" latinLnBrk="0" hangingPunct="1">
-                        <a:lnSpc>
-                          <a:spcPct val="100000"/>
-                        </a:lnSpc>
-                        <a:spcBef>
-                          <a:spcPts val="0"/>
-                        </a:spcBef>
-                        <a:spcAft>
-                          <a:spcPts val="0"/>
-                        </a:spcAft>
-                        <a:buClr>
-                          <a:srgbClr val="000000"/>
-                        </a:buClr>
-                        <a:buSzTx/>
-                        <a:buFont typeface="Arial"/>
-                        <a:buNone/>
-                        <a:tabLst/>
-                        <a:defRPr/>
-                      </a:pPr>
-                      <a:r>
-                        <a:rPr lang="en-US" sz="1400" b="0" i="0" u="none" strike="noStrike" dirty="0">
-                          <a:solidFill>
-                            <a:srgbClr val="FFFFFF"/>
-                          </a:solidFill>
-                          <a:effectLst/>
-                          <a:latin typeface="Instrument Sans Medium" panose="020B0604020202020204" charset="0"/>
-                        </a:rPr>
-                        <a:t>Tunnel 1</a:t>
-                      </a:r>
-                      <a:endParaRPr lang="hu-HU" sz="1400" b="0" i="0" u="none" strike="noStrike" dirty="0">
-                        <a:solidFill>
-                          <a:srgbClr val="FFFFFF"/>
-                        </a:solidFill>
-                        <a:effectLst/>
-                        <a:latin typeface="Instrument Sans Medium" panose="020B0604020202020204" charset="0"/>
-                      </a:endParaRPr>
-                    </a:p>
-                  </a:txBody>
-                  <a:tcPr marL="7034" marR="7034" marT="7034" marB="33765" anchor="b">
-                    <a:lnL w="12700" cap="flat" cmpd="sng" algn="ctr">
-                      <a:solidFill>
-                        <a:schemeClr val="tx1"/>
-                      </a:solidFill>
-                      <a:prstDash val="solid"/>
-                      <a:round/>
-                      <a:headEnd type="none" w="med" len="med"/>
-                      <a:tailEnd type="none" w="med" len="med"/>
-                    </a:lnL>
-                    <a:lnR w="12700" cap="flat" cmpd="sng" algn="ctr">
-                      <a:solidFill>
-                        <a:schemeClr val="tx1"/>
-                      </a:solidFill>
-                      <a:prstDash val="solid"/>
-                      <a:round/>
-                      <a:headEnd type="none" w="med" len="med"/>
-                      <a:tailEnd type="none" w="med" len="med"/>
-                    </a:lnR>
-                    <a:lnT w="12700" cap="flat" cmpd="sng" algn="ctr">
-                      <a:solidFill>
-                        <a:schemeClr val="tx1"/>
-                      </a:solidFill>
-                      <a:prstDash val="solid"/>
-                      <a:round/>
-                      <a:headEnd type="none" w="med" len="med"/>
-                      <a:tailEnd type="none" w="med" len="med"/>
-                    </a:lnT>
-                    <a:lnB w="12700" cap="flat" cmpd="sng" algn="ctr">
-                      <a:solidFill>
-                        <a:schemeClr val="tx1"/>
-                      </a:solidFill>
-                      <a:prstDash val="solid"/>
-                      <a:round/>
-                      <a:headEnd type="none" w="med" len="med"/>
-                      <a:tailEnd type="none" w="med" len="med"/>
-                    </a:lnB>
-                  </a:tcPr>
-                </a:tc>
-                <a:tc>
-                  <a:txBody>
-                    <a:bodyPr/>
-                    <a:lstStyle/>
-                    <a:p>
-                      <a:pPr marL="0" marR="0" lvl="0" indent="0" algn="l" defTabSz="914400" rtl="0" eaLnBrk="1" fontAlgn="b" latinLnBrk="0" hangingPunct="1">
-                        <a:lnSpc>
-                          <a:spcPct val="100000"/>
-                        </a:lnSpc>
-                        <a:spcBef>
-                          <a:spcPts val="0"/>
-                        </a:spcBef>
-                        <a:spcAft>
-                          <a:spcPts val="0"/>
-                        </a:spcAft>
-                        <a:buClr>
-                          <a:srgbClr val="000000"/>
-                        </a:buClr>
-                        <a:buSzTx/>
-                        <a:buFont typeface="Arial"/>
-                        <a:buNone/>
-                        <a:tabLst/>
-                        <a:defRPr/>
-                      </a:pPr>
-                      <a:r>
-                        <a:rPr lang="en-US" sz="1400" b="0" i="0" u="none" strike="noStrike" dirty="0">
-                          <a:solidFill>
-                            <a:srgbClr val="FFFFFF"/>
-                          </a:solidFill>
-                          <a:effectLst/>
-                          <a:latin typeface="Instrument Sans Medium" panose="020B0604020202020204" charset="0"/>
-                        </a:rPr>
-                        <a:t>10.0.2.6/30</a:t>
-                      </a:r>
-                      <a:endParaRPr lang="hu-HU" sz="1400" b="0" i="0" u="none" strike="noStrike" dirty="0">
-                        <a:solidFill>
-                          <a:srgbClr val="FFFFFF"/>
-                        </a:solidFill>
-                        <a:effectLst/>
-                        <a:latin typeface="Instrument Sans Medium" panose="020B0604020202020204" charset="0"/>
-                      </a:endParaRPr>
-                    </a:p>
-                  </a:txBody>
-                  <a:tcPr marL="7034" marR="7034" marT="7034" marB="33765" anchor="b">
-                    <a:lnL w="12700" cap="flat" cmpd="sng" algn="ctr">
-                      <a:solidFill>
-                        <a:schemeClr val="tx1"/>
-                      </a:solidFill>
-                      <a:prstDash val="solid"/>
-                      <a:round/>
-                      <a:headEnd type="none" w="med" len="med"/>
-                      <a:tailEnd type="none" w="med" len="med"/>
-                    </a:lnL>
-                    <a:lnR w="12700" cap="flat" cmpd="sng" algn="ctr">
-                      <a:solidFill>
-                        <a:schemeClr val="tx1"/>
-                      </a:solidFill>
-                      <a:prstDash val="solid"/>
-                      <a:round/>
-                      <a:headEnd type="none" w="med" len="med"/>
-                      <a:tailEnd type="none" w="med" len="med"/>
-                    </a:lnR>
-                    <a:lnT w="12700" cap="flat" cmpd="sng" algn="ctr">
-                      <a:solidFill>
-                        <a:schemeClr val="tx1"/>
-                      </a:solidFill>
-                      <a:prstDash val="solid"/>
-                      <a:round/>
-                      <a:headEnd type="none" w="med" len="med"/>
-                      <a:tailEnd type="none" w="med" len="med"/>
-                    </a:lnT>
-                    <a:lnB w="12700" cap="flat" cmpd="sng" algn="ctr">
-                      <a:solidFill>
-                        <a:schemeClr val="tx1"/>
-                      </a:solidFill>
-                      <a:prstDash val="solid"/>
-                      <a:round/>
-                      <a:headEnd type="none" w="med" len="med"/>
-                      <a:tailEnd type="none" w="med" len="med"/>
-                    </a:lnB>
-                  </a:tcPr>
-                </a:tc>
-                <a:tc>
-                  <a:txBody>
-                    <a:bodyPr/>
-                    <a:lstStyle/>
-                    <a:p>
-                      <a:pPr algn="ctr" fontAlgn="b"/>
-                      <a:r>
-                        <a:rPr lang="en-US" sz="1400" b="0" i="0" u="none" strike="noStrike" dirty="0">
-                          <a:solidFill>
-                            <a:srgbClr val="FFFFFF"/>
-                          </a:solidFill>
-                          <a:effectLst/>
-                          <a:latin typeface="Instrument Sans Medium" panose="020B0604020202020204" charset="0"/>
-                        </a:rPr>
-                        <a:t>-</a:t>
-                      </a:r>
-                      <a:endParaRPr lang="hu-HU" sz="1400" b="0" i="0" u="none" strike="noStrike" dirty="0">
-                        <a:solidFill>
-                          <a:srgbClr val="FFFFFF"/>
-                        </a:solidFill>
-                        <a:effectLst/>
-                        <a:latin typeface="Instrument Sans Medium" panose="020B0604020202020204" charset="0"/>
-                      </a:endParaRPr>
-                    </a:p>
-                  </a:txBody>
-                  <a:tcPr marL="7034" marR="7034" marT="7034" marB="33765" anchor="b">
-                    <a:lnL w="12700" cap="flat" cmpd="sng" algn="ctr">
-                      <a:solidFill>
-                        <a:schemeClr val="tx1"/>
-                      </a:solidFill>
-                      <a:prstDash val="solid"/>
-                      <a:round/>
-                      <a:headEnd type="none" w="med" len="med"/>
-                      <a:tailEnd type="none" w="med" len="med"/>
-                    </a:lnL>
-                    <a:lnR w="12700" cap="flat" cmpd="sng" algn="ctr">
-                      <a:solidFill>
-                        <a:schemeClr val="tx1"/>
-                      </a:solidFill>
-                      <a:prstDash val="solid"/>
-                      <a:round/>
-                      <a:headEnd type="none" w="med" len="med"/>
-                      <a:tailEnd type="none" w="med" len="med"/>
-                    </a:lnR>
-                    <a:lnT w="12700" cap="flat" cmpd="sng" algn="ctr">
-                      <a:solidFill>
-                        <a:schemeClr val="tx1"/>
-                      </a:solidFill>
-                      <a:prstDash val="solid"/>
-                      <a:round/>
-                      <a:headEnd type="none" w="med" len="med"/>
-                      <a:tailEnd type="none" w="med" len="med"/>
-                    </a:lnT>
-                    <a:lnB w="12700" cap="flat" cmpd="sng" algn="ctr">
-                      <a:solidFill>
-                        <a:schemeClr val="tx1"/>
-                      </a:solidFill>
-                      <a:prstDash val="solid"/>
-                      <a:round/>
-                      <a:headEnd type="none" w="med" len="med"/>
-                      <a:tailEnd type="none" w="med" len="med"/>
-                    </a:lnB>
-                  </a:tcPr>
-                </a:tc>
-                <a:tc>
-                  <a:txBody>
-                    <a:bodyPr/>
-                    <a:lstStyle/>
-                    <a:p>
-                      <a:pPr algn="ctr" fontAlgn="b"/>
-                      <a:r>
-                        <a:rPr lang="en-US" sz="1400" b="0" i="0" u="none" strike="noStrike" dirty="0">
-                          <a:solidFill>
-                            <a:srgbClr val="FFFFFF"/>
-                          </a:solidFill>
-                          <a:effectLst/>
-                          <a:latin typeface="Instrument Sans Medium" panose="020B0604020202020204" charset="0"/>
-                        </a:rPr>
-                        <a:t>-</a:t>
-                      </a:r>
-                      <a:endParaRPr lang="hu-HU" sz="1400" b="0" i="0" u="none" strike="noStrike" dirty="0">
-                        <a:solidFill>
-                          <a:srgbClr val="FFFFFF"/>
-                        </a:solidFill>
-                        <a:effectLst/>
-                        <a:latin typeface="Instrument Sans Medium" panose="020B0604020202020204" charset="0"/>
-                      </a:endParaRPr>
-                    </a:p>
-                  </a:txBody>
-                  <a:tcPr marL="7034" marR="7034" marT="7034" marB="33765" anchor="b">
-                    <a:lnL w="12700" cap="flat" cmpd="sng" algn="ctr">
-                      <a:solidFill>
-                        <a:schemeClr val="tx1"/>
-                      </a:solidFill>
-                      <a:prstDash val="solid"/>
-                      <a:round/>
-                      <a:headEnd type="none" w="med" len="med"/>
-                      <a:tailEnd type="none" w="med" len="med"/>
-                    </a:lnL>
-                    <a:lnR w="12700" cap="flat" cmpd="sng" algn="ctr">
-                      <a:solidFill>
-                        <a:schemeClr val="tx1"/>
-                      </a:solidFill>
-                      <a:prstDash val="solid"/>
-                      <a:round/>
-                      <a:headEnd type="none" w="med" len="med"/>
-                      <a:tailEnd type="none" w="med" len="med"/>
-                    </a:lnR>
-                    <a:lnT w="12700" cap="flat" cmpd="sng" algn="ctr">
-                      <a:solidFill>
-                        <a:schemeClr val="tx1"/>
-                      </a:solidFill>
-                      <a:prstDash val="solid"/>
-                      <a:round/>
-                      <a:headEnd type="none" w="med" len="med"/>
-                      <a:tailEnd type="none" w="med" len="med"/>
-                    </a:lnT>
-                    <a:lnB w="12700" cap="flat" cmpd="sng" algn="ctr">
-                      <a:solidFill>
-                        <a:schemeClr val="tx1"/>
-                      </a:solidFill>
-                      <a:prstDash val="solid"/>
-                      <a:round/>
-                      <a:headEnd type="none" w="med" len="med"/>
-                      <a:tailEnd type="none" w="med" len="med"/>
-                    </a:lnB>
-                  </a:tcPr>
-                </a:tc>
-                <a:extLst>
-                  <a:ext uri="{0D108BD9-81ED-4DB2-BD59-A6C34878D82A}">
-                    <a16:rowId xmlns:a16="http://schemas.microsoft.com/office/drawing/2014/main" val="2870688261"/>
-                  </a:ext>
-                </a:extLst>
-              </a:tr>
-              <a:tr h="142320">
-                <a:tc vMerge="1">
-                  <a:txBody>
-                    <a:bodyPr/>
-                    <a:lstStyle/>
-                    <a:p>
-                      <a:pPr algn="ctr"/>
-                      <a:endParaRPr lang="hu-HU" sz="1400" b="0" i="0" u="none" strike="noStrike" cap="none" dirty="0">
-                        <a:solidFill>
-                          <a:srgbClr val="FFFFFF"/>
-                        </a:solidFill>
-                        <a:effectLst/>
-                        <a:latin typeface="Instrument Sans Medium" panose="020B0604020202020204" charset="0"/>
-                        <a:ea typeface="+mn-ea"/>
-                        <a:cs typeface="+mn-cs"/>
-                        <a:sym typeface="Arial"/>
-                      </a:endParaRPr>
-                    </a:p>
-                  </a:txBody>
-                  <a:tcPr anchor="ctr">
-                    <a:lnT w="12700" cap="flat" cmpd="sng" algn="ctr">
-                      <a:solidFill>
-                        <a:schemeClr val="tx1"/>
-                      </a:solidFill>
-                      <a:prstDash val="solid"/>
-                      <a:round/>
-                      <a:headEnd type="none" w="med" len="med"/>
-                      <a:tailEnd type="none" w="med" len="med"/>
-                    </a:lnT>
-                  </a:tcPr>
-                </a:tc>
-                <a:tc>
-                  <a:txBody>
-                    <a:bodyPr/>
-                    <a:lstStyle/>
-                    <a:p>
-                      <a:pPr algn="ctr"/>
-                      <a:r>
-                        <a:rPr lang="en-US" sz="1400" b="0" i="0" u="none" strike="noStrike" cap="none" dirty="0">
-                          <a:solidFill>
-                            <a:srgbClr val="FFFFFF"/>
-                          </a:solidFill>
-                          <a:effectLst/>
-                          <a:latin typeface="Instrument Sans Medium" panose="020B0604020202020204" charset="0"/>
-                          <a:ea typeface="+mn-ea"/>
-                          <a:cs typeface="+mn-cs"/>
-                          <a:sym typeface="Arial"/>
-                        </a:rPr>
-                        <a:t>Asa1</a:t>
-                      </a:r>
-                      <a:endParaRPr lang="hu-HU" sz="1400" b="0" i="0" u="none" strike="noStrike" cap="none" dirty="0">
-                        <a:solidFill>
-                          <a:srgbClr val="FFFFFF"/>
-                        </a:solidFill>
-                        <a:effectLst/>
-                        <a:latin typeface="Instrument Sans Medium" panose="020B0604020202020204" charset="0"/>
-                        <a:ea typeface="+mn-ea"/>
-                        <a:cs typeface="+mn-cs"/>
-                        <a:sym typeface="Arial"/>
-                      </a:endParaRPr>
-                    </a:p>
-                  </a:txBody>
-                  <a:tcPr anchor="ctr">
-                    <a:lnT w="12700" cap="flat" cmpd="sng" algn="ctr">
-                      <a:solidFill>
-                        <a:schemeClr val="tx1"/>
-                      </a:solidFill>
-                      <a:prstDash val="solid"/>
-                      <a:round/>
-                      <a:headEnd type="none" w="med" len="med"/>
-                      <a:tailEnd type="none" w="med" len="med"/>
-                    </a:lnT>
-                  </a:tcPr>
-                </a:tc>
-                <a:tc>
-                  <a:txBody>
-                    <a:bodyPr/>
-                    <a:lstStyle/>
-                    <a:p>
-                      <a:pPr algn="l" fontAlgn="b"/>
-                      <a:r>
-                        <a:rPr lang="en-US" sz="1400" b="0" i="0" u="none" strike="noStrike" dirty="0">
-                          <a:solidFill>
-                            <a:srgbClr val="FFFFFF"/>
-                          </a:solidFill>
-                          <a:effectLst/>
-                          <a:latin typeface="Instrument Sans Medium" panose="020B0604020202020204" charset="0"/>
-                        </a:rPr>
-                        <a:t>VLAN 88</a:t>
-                      </a:r>
-                      <a:endParaRPr lang="hu-HU" sz="1400" b="0" i="0" u="none" strike="noStrike" dirty="0">
-                        <a:solidFill>
-                          <a:srgbClr val="FFFFFF"/>
-                        </a:solidFill>
-                        <a:effectLst/>
-                        <a:latin typeface="Instrument Sans Medium" panose="020B0604020202020204" charset="0"/>
-                      </a:endParaRPr>
-                    </a:p>
-                  </a:txBody>
-                  <a:tcPr marL="7034" marR="7034" marT="7034" marB="33765" anchor="b">
-                    <a:lnR w="12700" cap="flat" cmpd="sng" algn="ctr">
-                      <a:solidFill>
-                        <a:schemeClr val="tx1"/>
-                      </a:solidFill>
-                      <a:prstDash val="solid"/>
-                      <a:round/>
-                      <a:headEnd type="none" w="med" len="med"/>
-                      <a:tailEnd type="none" w="med" len="med"/>
-                    </a:lnR>
-                    <a:lnT w="12700" cap="flat" cmpd="sng" algn="ctr">
-                      <a:solidFill>
-                        <a:schemeClr val="tx1"/>
-                      </a:solidFill>
-                      <a:prstDash val="solid"/>
-                      <a:round/>
-                      <a:headEnd type="none" w="med" len="med"/>
-                      <a:tailEnd type="none" w="med" len="med"/>
-                    </a:lnT>
-                    <a:lnB w="12700" cap="flat" cmpd="sng" algn="ctr">
-                      <a:solidFill>
-                        <a:schemeClr val="tx1"/>
-                      </a:solidFill>
-                      <a:prstDash val="solid"/>
-                      <a:round/>
-                      <a:headEnd type="none" w="med" len="med"/>
-                      <a:tailEnd type="none" w="med" len="med"/>
-                    </a:lnB>
-                  </a:tcPr>
-                </a:tc>
-                <a:tc>
-                  <a:txBody>
-                    <a:bodyPr/>
-                    <a:lstStyle/>
-                    <a:p>
-                      <a:pPr algn="l" fontAlgn="b"/>
-                      <a:r>
-                        <a:rPr lang="en-US" sz="1400" b="0" i="0" u="none" strike="noStrike" dirty="0">
-                          <a:solidFill>
-                            <a:srgbClr val="FFFFFF"/>
-                          </a:solidFill>
-                          <a:effectLst/>
-                          <a:latin typeface="Instrument Sans Medium" panose="020B0604020202020204" charset="0"/>
-                        </a:rPr>
-                        <a:t>192.168.88.3/27</a:t>
-                      </a:r>
-                      <a:endParaRPr lang="hu-HU" sz="1400" b="0" i="0" u="none" strike="noStrike" dirty="0">
-                        <a:solidFill>
-                          <a:srgbClr val="FFFFFF"/>
-                        </a:solidFill>
-                        <a:effectLst/>
-                        <a:latin typeface="Instrument Sans Medium" panose="020B0604020202020204" charset="0"/>
-                      </a:endParaRPr>
-                    </a:p>
-                  </a:txBody>
-                  <a:tcPr marL="7034" marR="7034" marT="7034" marB="33765" anchor="b">
-                    <a:lnL w="12700" cap="flat" cmpd="sng" algn="ctr">
-                      <a:solidFill>
-                        <a:schemeClr val="tx1"/>
-                      </a:solidFill>
-                      <a:prstDash val="solid"/>
-                      <a:round/>
-                      <a:headEnd type="none" w="med" len="med"/>
-                      <a:tailEnd type="none" w="med" len="med"/>
-                    </a:lnL>
-                    <a:lnR w="12700" cap="flat" cmpd="sng" algn="ctr">
-                      <a:solidFill>
-                        <a:schemeClr val="tx1"/>
-                      </a:solidFill>
-                      <a:prstDash val="solid"/>
-                      <a:round/>
-                      <a:headEnd type="none" w="med" len="med"/>
-                      <a:tailEnd type="none" w="med" len="med"/>
-                    </a:lnR>
-                    <a:lnT w="12700" cap="flat" cmpd="sng" algn="ctr">
-                      <a:solidFill>
-                        <a:schemeClr val="tx1"/>
-                      </a:solidFill>
-                      <a:prstDash val="solid"/>
-                      <a:round/>
-                      <a:headEnd type="none" w="med" len="med"/>
-                      <a:tailEnd type="none" w="med" len="med"/>
-                    </a:lnT>
-                    <a:lnB w="12700" cap="flat" cmpd="sng" algn="ctr">
-                      <a:solidFill>
-                        <a:schemeClr val="tx1"/>
-                      </a:solidFill>
-                      <a:prstDash val="solid"/>
-                      <a:round/>
-                      <a:headEnd type="none" w="med" len="med"/>
-                      <a:tailEnd type="none" w="med" len="med"/>
-                    </a:lnB>
-                  </a:tcPr>
-                </a:tc>
-                <a:tc>
-                  <a:txBody>
-                    <a:bodyPr/>
-                    <a:lstStyle/>
-                    <a:p>
-                      <a:pPr algn="ctr" fontAlgn="b"/>
-                      <a:r>
-                        <a:rPr lang="en-US" sz="1400" b="0" i="0" u="none" strike="noStrike" dirty="0">
-                          <a:solidFill>
-                            <a:srgbClr val="FFFFFF"/>
-                          </a:solidFill>
-                          <a:effectLst/>
-                          <a:latin typeface="Instrument Sans Medium" panose="020B0604020202020204" charset="0"/>
-                        </a:rPr>
-                        <a:t>-</a:t>
+                        <a:t>2001:DB8:30:88::3/64</a:t>
                       </a:r>
                       <a:endParaRPr lang="hu-HU" sz="1400" b="0" i="0" u="none" strike="noStrike" dirty="0">
                         <a:solidFill>
@@ -22872,6 +22296,24 @@
                     </a:p>
                   </a:txBody>
                   <a:tcPr anchor="ctr">
+                    <a:lnL w="12700" cap="flat" cmpd="sng" algn="ctr">
+                      <a:solidFill>
+                        <a:schemeClr val="tx1"/>
+                      </a:solidFill>
+                      <a:prstDash val="solid"/>
+                      <a:round/>
+                      <a:headEnd type="none" w="med" len="med"/>
+                      <a:tailEnd type="none" w="med" len="med"/>
+                    </a:lnL>
+                    <a:lnR w="12700" cap="flat" cmpd="sng" algn="ctr">
+                      <a:solidFill>
+                        <a:schemeClr val="tx1"/>
+                      </a:solidFill>
+                      <a:prstDash val="solid"/>
+                      <a:round/>
+                      <a:headEnd type="none" w="med" len="med"/>
+                      <a:tailEnd type="none" w="med" len="med"/>
+                    </a:lnR>
                     <a:lnT w="12700" cap="flat" cmpd="sng" algn="ctr">
                       <a:solidFill>
                         <a:schemeClr val="tx1"/>
@@ -22881,6 +22323,15 @@
                       <a:headEnd type="none" w="med" len="med"/>
                       <a:tailEnd type="none" w="med" len="med"/>
                     </a:lnT>
+                    <a:lnB w="12700" cap="flat" cmpd="sng" algn="ctr">
+                      <a:solidFill>
+                        <a:schemeClr val="tx1"/>
+                      </a:solidFill>
+                      <a:prstDash val="solid"/>
+                      <a:round/>
+                      <a:headEnd type="none" w="med" len="med"/>
+                      <a:tailEnd type="none" w="med" len="med"/>
+                    </a:lnB>
                   </a:tcPr>
                 </a:tc>
                 <a:tc>
@@ -22909,6 +22360,15 @@
                     </a:p>
                   </a:txBody>
                   <a:tcPr marL="7034" marR="7034" marT="7034" marB="33765" anchor="b">
+                    <a:lnL w="12700" cap="flat" cmpd="sng" algn="ctr">
+                      <a:solidFill>
+                        <a:schemeClr val="tx1"/>
+                      </a:solidFill>
+                      <a:prstDash val="solid"/>
+                      <a:round/>
+                      <a:headEnd type="none" w="med" len="med"/>
+                      <a:tailEnd type="none" w="med" len="med"/>
+                    </a:lnL>
                     <a:lnR w="12700" cap="flat" cmpd="sng" algn="ctr">
                       <a:solidFill>
                         <a:schemeClr val="tx1"/>
@@ -23007,7 +22467,7 @@
                     <a:bodyPr/>
                     <a:lstStyle/>
                     <a:p>
-                      <a:pPr algn="ctr" fontAlgn="b"/>
+                      <a:pPr algn="l" fontAlgn="b"/>
                       <a:r>
                         <a:rPr lang="en-US" sz="1400" b="0" i="0" u="none" strike="noStrike" dirty="0">
                           <a:solidFill>
@@ -23016,7 +22476,7 @@
                           <a:effectLst/>
                           <a:latin typeface="Instrument Sans Medium" panose="020B0604020202020204" charset="0"/>
                         </a:rPr>
-                        <a:t>-</a:t>
+                        <a:t>2001:DB8:30:88::4/64</a:t>
                       </a:r>
                       <a:endParaRPr lang="hu-HU" sz="1400" b="0" i="0" u="none" strike="noStrike" dirty="0">
                         <a:solidFill>
@@ -23388,7 +22848,7 @@
                     <a:bodyPr/>
                     <a:lstStyle/>
                     <a:p>
-                      <a:pPr algn="ctr" fontAlgn="b"/>
+                      <a:pPr algn="l" fontAlgn="b"/>
                       <a:r>
                         <a:rPr lang="en-US" sz="1400" b="0" i="0" u="none" strike="noStrike" dirty="0">
                           <a:solidFill>
@@ -23397,7 +22857,7 @@
                           <a:effectLst/>
                           <a:latin typeface="Instrument Sans Medium" panose="020B0604020202020204" charset="0"/>
                         </a:rPr>
-                        <a:t>-</a:t>
+                        <a:t>2001:DB8:30:88::5/64</a:t>
                       </a:r>
                       <a:endParaRPr lang="hu-HU" sz="1400" b="0" i="0" u="none" strike="noStrike" dirty="0">
                         <a:solidFill>
@@ -23769,7 +23229,7 @@
                     <a:bodyPr/>
                     <a:lstStyle/>
                     <a:p>
-                      <a:pPr algn="ctr" fontAlgn="b"/>
+                      <a:pPr algn="l" fontAlgn="b"/>
                       <a:r>
                         <a:rPr lang="en-US" sz="1400" b="0" i="0" u="none" strike="noStrike" dirty="0">
                           <a:solidFill>
@@ -23778,7 +23238,7 @@
                           <a:effectLst/>
                           <a:latin typeface="Instrument Sans Medium" panose="020B0604020202020204" charset="0"/>
                         </a:rPr>
-                        <a:t>-</a:t>
+                        <a:t>2001:DB8:30:88::6/64</a:t>
                       </a:r>
                       <a:endParaRPr lang="hu-HU" sz="1400" b="0" i="0" u="none" strike="noStrike" dirty="0">
                         <a:solidFill>
@@ -25060,7 +24520,7 @@
                 </a:extLst>
               </a:tr>
               <a:tr h="127080">
-                <a:tc rowSpan="4">
+                <a:tc rowSpan="5">
                   <a:txBody>
                     <a:bodyPr/>
                     <a:lstStyle/>
@@ -25124,7 +24584,7 @@
                     </a:lnB>
                   </a:tcPr>
                 </a:tc>
-                <a:tc rowSpan="2">
+                <a:tc rowSpan="3">
                   <a:txBody>
                     <a:bodyPr/>
                     <a:lstStyle/>
@@ -25726,6 +25186,285 @@
                   </a:ext>
                 </a:extLst>
               </a:tr>
+              <a:tr h="127080">
+                <a:tc vMerge="1">
+                  <a:txBody>
+                    <a:bodyPr/>
+                    <a:lstStyle/>
+                    <a:p>
+                      <a:endParaRPr lang="hu-HU"/>
+                    </a:p>
+                  </a:txBody>
+                  <a:tcPr/>
+                </a:tc>
+                <a:tc vMerge="1">
+                  <a:txBody>
+                    <a:bodyPr/>
+                    <a:lstStyle/>
+                    <a:p>
+                      <a:endParaRPr lang="hu-HU"/>
+                    </a:p>
+                  </a:txBody>
+                  <a:tcPr/>
+                </a:tc>
+                <a:tc>
+                  <a:txBody>
+                    <a:bodyPr/>
+                    <a:lstStyle/>
+                    <a:p>
+                      <a:pPr algn="l" fontAlgn="b"/>
+                      <a:r>
+                        <a:rPr lang="en-US" sz="1400" b="0" i="0" u="none" strike="noStrike" dirty="0">
+                          <a:solidFill>
+                            <a:srgbClr val="FFFFFF"/>
+                          </a:solidFill>
+                          <a:effectLst/>
+                          <a:latin typeface="Instrument Sans Medium" panose="020B0604020202020204" charset="0"/>
+                        </a:rPr>
+                        <a:t>Tunnel 0</a:t>
+                      </a:r>
+                      <a:endParaRPr lang="hu-HU" sz="1400" b="0" i="0" u="none" strike="noStrike" dirty="0">
+                        <a:solidFill>
+                          <a:srgbClr val="FFFFFF"/>
+                        </a:solidFill>
+                        <a:effectLst/>
+                        <a:latin typeface="Instrument Sans Medium" panose="020B0604020202020204" charset="0"/>
+                      </a:endParaRPr>
+                    </a:p>
+                  </a:txBody>
+                  <a:tcPr marL="7034" marR="7034" marT="7034" marB="33765" anchor="b">
+                    <a:lnL w="12700" cap="flat" cmpd="sng" algn="ctr">
+                      <a:solidFill>
+                        <a:schemeClr val="tx1"/>
+                      </a:solidFill>
+                      <a:prstDash val="solid"/>
+                      <a:round/>
+                      <a:headEnd type="none" w="med" len="med"/>
+                      <a:tailEnd type="none" w="med" len="med"/>
+                    </a:lnL>
+                    <a:lnR w="12700" cap="flat" cmpd="sng" algn="ctr">
+                      <a:solidFill>
+                        <a:schemeClr val="tx1"/>
+                      </a:solidFill>
+                      <a:prstDash val="solid"/>
+                      <a:round/>
+                      <a:headEnd type="none" w="med" len="med"/>
+                      <a:tailEnd type="none" w="med" len="med"/>
+                    </a:lnR>
+                    <a:lnT w="12700" cap="flat" cmpd="sng" algn="ctr">
+                      <a:solidFill>
+                        <a:schemeClr val="tx1"/>
+                      </a:solidFill>
+                      <a:prstDash val="solid"/>
+                      <a:round/>
+                      <a:headEnd type="none" w="med" len="med"/>
+                      <a:tailEnd type="none" w="med" len="med"/>
+                    </a:lnT>
+                    <a:lnB w="12700" cap="flat" cmpd="sng" algn="ctr">
+                      <a:solidFill>
+                        <a:schemeClr val="tx1"/>
+                      </a:solidFill>
+                      <a:prstDash val="solid"/>
+                      <a:round/>
+                      <a:headEnd type="none" w="med" len="med"/>
+                      <a:tailEnd type="none" w="med" len="med"/>
+                    </a:lnB>
+                  </a:tcPr>
+                </a:tc>
+                <a:tc>
+                  <a:txBody>
+                    <a:bodyPr/>
+                    <a:lstStyle/>
+                    <a:p>
+                      <a:pPr algn="l" fontAlgn="b"/>
+                      <a:r>
+                        <a:rPr lang="en-US" sz="1400" b="0" i="0" u="none" strike="noStrike" dirty="0">
+                          <a:solidFill>
+                            <a:srgbClr val="FFFFFF"/>
+                          </a:solidFill>
+                          <a:effectLst/>
+                          <a:latin typeface="Instrument Sans Medium" panose="020B0604020202020204" charset="0"/>
+                        </a:rPr>
+                        <a:t>10.0.1.2/30</a:t>
+                      </a:r>
+                      <a:endParaRPr lang="hu-HU" sz="1400" b="0" i="0" u="none" strike="noStrike" dirty="0">
+                        <a:solidFill>
+                          <a:srgbClr val="FFFFFF"/>
+                        </a:solidFill>
+                        <a:effectLst/>
+                        <a:latin typeface="Instrument Sans Medium" panose="020B0604020202020204" charset="0"/>
+                      </a:endParaRPr>
+                    </a:p>
+                  </a:txBody>
+                  <a:tcPr marL="7034" marR="7034" marT="7034" marB="33765" anchor="b">
+                    <a:lnL w="12700" cap="flat" cmpd="sng" algn="ctr">
+                      <a:solidFill>
+                        <a:schemeClr val="tx1"/>
+                      </a:solidFill>
+                      <a:prstDash val="solid"/>
+                      <a:round/>
+                      <a:headEnd type="none" w="med" len="med"/>
+                      <a:tailEnd type="none" w="med" len="med"/>
+                    </a:lnL>
+                    <a:lnR w="12700" cap="flat" cmpd="sng" algn="ctr">
+                      <a:solidFill>
+                        <a:schemeClr val="tx1"/>
+                      </a:solidFill>
+                      <a:prstDash val="solid"/>
+                      <a:round/>
+                      <a:headEnd type="none" w="med" len="med"/>
+                      <a:tailEnd type="none" w="med" len="med"/>
+                    </a:lnR>
+                    <a:lnT w="12700" cap="flat" cmpd="sng" algn="ctr">
+                      <a:solidFill>
+                        <a:schemeClr val="tx1"/>
+                      </a:solidFill>
+                      <a:prstDash val="solid"/>
+                      <a:round/>
+                      <a:headEnd type="none" w="med" len="med"/>
+                      <a:tailEnd type="none" w="med" len="med"/>
+                    </a:lnT>
+                    <a:lnB w="12700" cap="flat" cmpd="sng" algn="ctr">
+                      <a:solidFill>
+                        <a:schemeClr val="tx1"/>
+                      </a:solidFill>
+                      <a:prstDash val="solid"/>
+                      <a:round/>
+                      <a:headEnd type="none" w="med" len="med"/>
+                      <a:tailEnd type="none" w="med" len="med"/>
+                    </a:lnB>
+                    <a:solidFill>
+                      <a:schemeClr val="accent6"/>
+                    </a:solidFill>
+                  </a:tcPr>
+                </a:tc>
+                <a:tc>
+                  <a:txBody>
+                    <a:bodyPr/>
+                    <a:lstStyle/>
+                    <a:p>
+                      <a:pPr algn="ctr" fontAlgn="b"/>
+                      <a:r>
+                        <a:rPr lang="en-US" sz="1400" b="0" i="0" u="none" strike="noStrike" dirty="0">
+                          <a:solidFill>
+                            <a:srgbClr val="FFFFFF"/>
+                          </a:solidFill>
+                          <a:effectLst/>
+                          <a:latin typeface="Instrument Sans Medium" panose="020B0604020202020204" charset="0"/>
+                        </a:rPr>
+                        <a:t>-</a:t>
+                      </a:r>
+                    </a:p>
+                  </a:txBody>
+                  <a:tcPr marL="7034" marR="7034" marT="7034" marB="33765" anchor="b">
+                    <a:lnL w="12700" cap="flat" cmpd="sng" algn="ctr">
+                      <a:solidFill>
+                        <a:schemeClr val="tx1"/>
+                      </a:solidFill>
+                      <a:prstDash val="solid"/>
+                      <a:round/>
+                      <a:headEnd type="none" w="med" len="med"/>
+                      <a:tailEnd type="none" w="med" len="med"/>
+                    </a:lnL>
+                    <a:lnR w="12700" cap="flat" cmpd="sng" algn="ctr">
+                      <a:solidFill>
+                        <a:schemeClr val="tx1"/>
+                      </a:solidFill>
+                      <a:prstDash val="solid"/>
+                      <a:round/>
+                      <a:headEnd type="none" w="med" len="med"/>
+                      <a:tailEnd type="none" w="med" len="med"/>
+                    </a:lnR>
+                    <a:lnT w="12700" cap="flat" cmpd="sng" algn="ctr">
+                      <a:solidFill>
+                        <a:schemeClr val="tx1"/>
+                      </a:solidFill>
+                      <a:prstDash val="solid"/>
+                      <a:round/>
+                      <a:headEnd type="none" w="med" len="med"/>
+                      <a:tailEnd type="none" w="med" len="med"/>
+                    </a:lnT>
+                    <a:lnB w="12700" cap="flat" cmpd="sng" algn="ctr">
+                      <a:solidFill>
+                        <a:schemeClr val="tx1"/>
+                      </a:solidFill>
+                      <a:prstDash val="solid"/>
+                      <a:round/>
+                      <a:headEnd type="none" w="med" len="med"/>
+                      <a:tailEnd type="none" w="med" len="med"/>
+                    </a:lnB>
+                  </a:tcPr>
+                </a:tc>
+                <a:tc>
+                  <a:txBody>
+                    <a:bodyPr/>
+                    <a:lstStyle/>
+                    <a:p>
+                      <a:pPr algn="ctr" fontAlgn="b"/>
+                      <a:r>
+                        <a:rPr lang="en-US" sz="1400" b="0" i="0" u="none" strike="noStrike" dirty="0">
+                          <a:solidFill>
+                            <a:srgbClr val="FFFFFF"/>
+                          </a:solidFill>
+                          <a:effectLst/>
+                          <a:latin typeface="Instrument Sans Medium" panose="020B0604020202020204" charset="0"/>
+                        </a:rPr>
+                        <a:t>-</a:t>
+                      </a:r>
+                      <a:endParaRPr lang="hu-HU" sz="1400" b="0" i="0" u="none" strike="noStrike" dirty="0">
+                        <a:solidFill>
+                          <a:srgbClr val="FFFFFF"/>
+                        </a:solidFill>
+                        <a:effectLst/>
+                        <a:latin typeface="Instrument Sans Medium" panose="020B0604020202020204" charset="0"/>
+                      </a:endParaRPr>
+                    </a:p>
+                  </a:txBody>
+                  <a:tcPr marL="7034" marR="7034" marT="7034" marB="33765" anchor="b">
+                    <a:lnL w="12700" cap="flat" cmpd="sng" algn="ctr">
+                      <a:solidFill>
+                        <a:schemeClr val="tx1"/>
+                      </a:solidFill>
+                      <a:prstDash val="solid"/>
+                      <a:round/>
+                      <a:headEnd type="none" w="med" len="med"/>
+                      <a:tailEnd type="none" w="med" len="med"/>
+                    </a:lnL>
+                    <a:lnR w="12700" cap="flat" cmpd="sng" algn="ctr">
+                      <a:solidFill>
+                        <a:schemeClr val="tx1"/>
+                      </a:solidFill>
+                      <a:prstDash val="solid"/>
+                      <a:round/>
+                      <a:headEnd type="none" w="med" len="med"/>
+                      <a:tailEnd type="none" w="med" len="med"/>
+                    </a:lnR>
+                    <a:lnT w="12700" cap="flat" cmpd="sng" algn="ctr">
+                      <a:solidFill>
+                        <a:schemeClr val="tx1"/>
+                      </a:solidFill>
+                      <a:prstDash val="solid"/>
+                      <a:round/>
+                      <a:headEnd type="none" w="med" len="med"/>
+                      <a:tailEnd type="none" w="med" len="med"/>
+                    </a:lnT>
+                    <a:lnB w="12700" cap="flat" cmpd="sng" algn="ctr">
+                      <a:solidFill>
+                        <a:schemeClr val="tx1"/>
+                      </a:solidFill>
+                      <a:prstDash val="solid"/>
+                      <a:round/>
+                      <a:headEnd type="none" w="med" len="med"/>
+                      <a:tailEnd type="none" w="med" len="med"/>
+                    </a:lnB>
+                  </a:tcPr>
+                </a:tc>
+                <a:extLst>
+                  <a:ext uri="{0D108BD9-81ED-4DB2-BD59-A6C34878D82A}">
+                    <a16:rowId xmlns:a16="http://schemas.microsoft.com/office/drawing/2014/main" val="4231362747"/>
+                  </a:ext>
+                </a:extLst>
+              </a:tr>
               <a:tr h="236104">
                 <a:tc vMerge="1">
                   <a:txBody>
@@ -25971,7 +25710,7 @@
                     <a:bodyPr/>
                     <a:lstStyle/>
                     <a:p>
-                      <a:pPr algn="ctr" fontAlgn="b"/>
+                      <a:pPr algn="l" fontAlgn="b"/>
                       <a:r>
                         <a:rPr lang="en-US" sz="1400" b="0" i="0" u="none" strike="noStrike" dirty="0">
                           <a:solidFill>
@@ -25980,7 +25719,7 @@
                           <a:effectLst/>
                           <a:latin typeface="Instrument Sans Medium" panose="020B0604020202020204" charset="0"/>
                         </a:rPr>
-                        <a:t>-</a:t>
+                        <a:t>2001:DB8:30:88::7/64</a:t>
                       </a:r>
                       <a:endParaRPr lang="hu-HU" sz="1400" b="0" i="0" u="none" strike="noStrike" dirty="0">
                         <a:solidFill>
@@ -26500,7 +26239,7 @@
                 </a:extLst>
               </a:tr>
               <a:tr h="127080">
-                <a:tc rowSpan="3">
+                <a:tc rowSpan="4">
                   <a:txBody>
                     <a:bodyPr/>
                     <a:lstStyle/>
@@ -26564,7 +26303,7 @@
                     </a:lnB>
                   </a:tcPr>
                 </a:tc>
-                <a:tc rowSpan="2">
+                <a:tc rowSpan="3">
                   <a:txBody>
                     <a:bodyPr/>
                     <a:lstStyle/>
@@ -27170,6 +26909,298 @@
                   </a:ext>
                 </a:extLst>
               </a:tr>
+              <a:tr h="127080">
+                <a:tc vMerge="1">
+                  <a:txBody>
+                    <a:bodyPr/>
+                    <a:lstStyle/>
+                    <a:p>
+                      <a:endParaRPr lang="hu-HU"/>
+                    </a:p>
+                  </a:txBody>
+                  <a:tcPr/>
+                </a:tc>
+                <a:tc vMerge="1">
+                  <a:txBody>
+                    <a:bodyPr/>
+                    <a:lstStyle/>
+                    <a:p>
+                      <a:endParaRPr lang="hu-HU"/>
+                    </a:p>
+                  </a:txBody>
+                  <a:tcPr/>
+                </a:tc>
+                <a:tc>
+                  <a:txBody>
+                    <a:bodyPr/>
+                    <a:lstStyle/>
+                    <a:p>
+                      <a:pPr algn="l" fontAlgn="b"/>
+                      <a:r>
+                        <a:rPr lang="en-US" sz="1400" b="0" i="0" u="none" strike="noStrike" dirty="0">
+                          <a:solidFill>
+                            <a:srgbClr val="FFFFFF"/>
+                          </a:solidFill>
+                          <a:effectLst/>
+                          <a:latin typeface="Instrument Sans Medium" panose="020B0604020202020204" charset="0"/>
+                        </a:rPr>
+                        <a:t>Tunnel 1</a:t>
+                      </a:r>
+                      <a:endParaRPr lang="hu-HU" sz="1400" b="0" i="0" u="none" strike="noStrike" dirty="0">
+                        <a:solidFill>
+                          <a:srgbClr val="FFFFFF"/>
+                        </a:solidFill>
+                        <a:effectLst/>
+                        <a:latin typeface="Instrument Sans Medium" panose="020B0604020202020204" charset="0"/>
+                      </a:endParaRPr>
+                    </a:p>
+                  </a:txBody>
+                  <a:tcPr marL="7034" marR="7034" marT="7034" marB="33765" anchor="b">
+                    <a:lnL w="12700" cap="flat" cmpd="sng" algn="ctr">
+                      <a:solidFill>
+                        <a:schemeClr val="tx1"/>
+                      </a:solidFill>
+                      <a:prstDash val="solid"/>
+                      <a:round/>
+                      <a:headEnd type="none" w="med" len="med"/>
+                      <a:tailEnd type="none" w="med" len="med"/>
+                    </a:lnL>
+                    <a:lnR w="12700" cap="flat" cmpd="sng" algn="ctr">
+                      <a:solidFill>
+                        <a:schemeClr val="tx1"/>
+                      </a:solidFill>
+                      <a:prstDash val="solid"/>
+                      <a:round/>
+                      <a:headEnd type="none" w="med" len="med"/>
+                      <a:tailEnd type="none" w="med" len="med"/>
+                    </a:lnR>
+                    <a:lnT w="12700" cap="flat" cmpd="sng" algn="ctr">
+                      <a:solidFill>
+                        <a:schemeClr val="tx1"/>
+                      </a:solidFill>
+                      <a:prstDash val="solid"/>
+                      <a:round/>
+                      <a:headEnd type="none" w="med" len="med"/>
+                      <a:tailEnd type="none" w="med" len="med"/>
+                    </a:lnT>
+                    <a:lnB w="12700" cap="flat" cmpd="sng" algn="ctr">
+                      <a:solidFill>
+                        <a:schemeClr val="tx1"/>
+                      </a:solidFill>
+                      <a:prstDash val="solid"/>
+                      <a:round/>
+                      <a:headEnd type="none" w="med" len="med"/>
+                      <a:tailEnd type="none" w="med" len="med"/>
+                    </a:lnB>
+                  </a:tcPr>
+                </a:tc>
+                <a:tc>
+                  <a:txBody>
+                    <a:bodyPr/>
+                    <a:lstStyle/>
+                    <a:p>
+                      <a:pPr algn="l" fontAlgn="b"/>
+                      <a:r>
+                        <a:rPr lang="en-US" sz="1400" b="0" i="0" u="none" strike="noStrike" dirty="0">
+                          <a:solidFill>
+                            <a:srgbClr val="FFFFFF"/>
+                          </a:solidFill>
+                          <a:effectLst/>
+                          <a:latin typeface="Instrument Sans Medium" panose="020B0604020202020204" charset="0"/>
+                        </a:rPr>
+                        <a:t>10.0.2.2</a:t>
+                      </a:r>
+                      <a:endParaRPr lang="hu-HU" sz="1400" b="0" i="0" u="none" strike="noStrike" dirty="0">
+                        <a:solidFill>
+                          <a:srgbClr val="FFFFFF"/>
+                        </a:solidFill>
+                        <a:effectLst/>
+                        <a:latin typeface="Instrument Sans Medium" panose="020B0604020202020204" charset="0"/>
+                      </a:endParaRPr>
+                    </a:p>
+                  </a:txBody>
+                  <a:tcPr marL="7034" marR="7034" marT="7034" marB="33765" anchor="b">
+                    <a:lnL w="12700" cap="flat" cmpd="sng" algn="ctr">
+                      <a:solidFill>
+                        <a:schemeClr val="tx1"/>
+                      </a:solidFill>
+                      <a:prstDash val="solid"/>
+                      <a:round/>
+                      <a:headEnd type="none" w="med" len="med"/>
+                      <a:tailEnd type="none" w="med" len="med"/>
+                    </a:lnL>
+                    <a:lnR w="12700" cap="flat" cmpd="sng" algn="ctr">
+                      <a:solidFill>
+                        <a:schemeClr val="tx1"/>
+                      </a:solidFill>
+                      <a:prstDash val="solid"/>
+                      <a:round/>
+                      <a:headEnd type="none" w="med" len="med"/>
+                      <a:tailEnd type="none" w="med" len="med"/>
+                    </a:lnR>
+                    <a:lnT w="12700" cap="flat" cmpd="sng" algn="ctr">
+                      <a:solidFill>
+                        <a:schemeClr val="tx1"/>
+                      </a:solidFill>
+                      <a:prstDash val="solid"/>
+                      <a:round/>
+                      <a:headEnd type="none" w="med" len="med"/>
+                      <a:tailEnd type="none" w="med" len="med"/>
+                    </a:lnT>
+                    <a:lnB w="12700" cap="flat" cmpd="sng" algn="ctr">
+                      <a:solidFill>
+                        <a:schemeClr val="tx1"/>
+                      </a:solidFill>
+                      <a:prstDash val="solid"/>
+                      <a:round/>
+                      <a:headEnd type="none" w="med" len="med"/>
+                      <a:tailEnd type="none" w="med" len="med"/>
+                    </a:lnB>
+                    <a:solidFill>
+                      <a:schemeClr val="accent2">
+                        <a:lumMod val="75000"/>
+                      </a:schemeClr>
+                    </a:solidFill>
+                  </a:tcPr>
+                </a:tc>
+                <a:tc>
+                  <a:txBody>
+                    <a:bodyPr/>
+                    <a:lstStyle/>
+                    <a:p>
+                      <a:pPr marL="0" marR="0" lvl="0" indent="0" algn="ctr" defTabSz="914400" rtl="0" eaLnBrk="1" fontAlgn="b" latinLnBrk="0" hangingPunct="1">
+                        <a:lnSpc>
+                          <a:spcPct val="100000"/>
+                        </a:lnSpc>
+                        <a:spcBef>
+                          <a:spcPts val="0"/>
+                        </a:spcBef>
+                        <a:spcAft>
+                          <a:spcPts val="0"/>
+                        </a:spcAft>
+                        <a:buClr>
+                          <a:srgbClr val="000000"/>
+                        </a:buClr>
+                        <a:buSzTx/>
+                        <a:buFont typeface="Arial"/>
+                        <a:buNone/>
+                        <a:tabLst/>
+                        <a:defRPr/>
+                      </a:pPr>
+                      <a:r>
+                        <a:rPr lang="en-US" sz="1400" b="0" i="0" u="none" strike="noStrike" dirty="0">
+                          <a:solidFill>
+                            <a:srgbClr val="FFFFFF"/>
+                          </a:solidFill>
+                          <a:effectLst/>
+                          <a:latin typeface="Instrument Sans Medium" panose="020B0604020202020204" charset="0"/>
+                        </a:rPr>
+                        <a:t>-</a:t>
+                      </a:r>
+                    </a:p>
+                  </a:txBody>
+                  <a:tcPr marL="7034" marR="7034" marT="7034" marB="33765" anchor="b">
+                    <a:lnL w="12700" cap="flat" cmpd="sng" algn="ctr">
+                      <a:solidFill>
+                        <a:schemeClr val="tx1"/>
+                      </a:solidFill>
+                      <a:prstDash val="solid"/>
+                      <a:round/>
+                      <a:headEnd type="none" w="med" len="med"/>
+                      <a:tailEnd type="none" w="med" len="med"/>
+                    </a:lnL>
+                    <a:lnR w="12700" cap="flat" cmpd="sng" algn="ctr">
+                      <a:solidFill>
+                        <a:schemeClr val="tx1"/>
+                      </a:solidFill>
+                      <a:prstDash val="solid"/>
+                      <a:round/>
+                      <a:headEnd type="none" w="med" len="med"/>
+                      <a:tailEnd type="none" w="med" len="med"/>
+                    </a:lnR>
+                    <a:lnT w="12700" cap="flat" cmpd="sng" algn="ctr">
+                      <a:solidFill>
+                        <a:schemeClr val="tx1"/>
+                      </a:solidFill>
+                      <a:prstDash val="solid"/>
+                      <a:round/>
+                      <a:headEnd type="none" w="med" len="med"/>
+                      <a:tailEnd type="none" w="med" len="med"/>
+                    </a:lnT>
+                    <a:lnB w="12700" cap="flat" cmpd="sng" algn="ctr">
+                      <a:solidFill>
+                        <a:schemeClr val="tx1"/>
+                      </a:solidFill>
+                      <a:prstDash val="solid"/>
+                      <a:round/>
+                      <a:headEnd type="none" w="med" len="med"/>
+                      <a:tailEnd type="none" w="med" len="med"/>
+                    </a:lnB>
+                  </a:tcPr>
+                </a:tc>
+                <a:tc>
+                  <a:txBody>
+                    <a:bodyPr/>
+                    <a:lstStyle/>
+                    <a:p>
+                      <a:pPr algn="ctr" fontAlgn="b"/>
+                      <a:r>
+                        <a:rPr lang="en-US" sz="1400" b="0" i="0" u="none" strike="noStrike" dirty="0">
+                          <a:solidFill>
+                            <a:srgbClr val="FFFFFF"/>
+                          </a:solidFill>
+                          <a:effectLst/>
+                          <a:latin typeface="Instrument Sans Medium" panose="020B0604020202020204" charset="0"/>
+                        </a:rPr>
+                        <a:t>-</a:t>
+                      </a:r>
+                    </a:p>
+                  </a:txBody>
+                  <a:tcPr marL="7034" marR="7034" marT="7034" marB="33765" anchor="b">
+                    <a:lnL w="12700" cap="flat" cmpd="sng" algn="ctr">
+                      <a:solidFill>
+                        <a:schemeClr val="tx1"/>
+                      </a:solidFill>
+                      <a:prstDash val="solid"/>
+                      <a:round/>
+                      <a:headEnd type="none" w="med" len="med"/>
+                      <a:tailEnd type="none" w="med" len="med"/>
+                    </a:lnL>
+                    <a:lnR w="12700" cap="flat" cmpd="sng" algn="ctr">
+                      <a:solidFill>
+                        <a:schemeClr val="tx1"/>
+                      </a:solidFill>
+                      <a:prstDash val="solid"/>
+                      <a:round/>
+                      <a:headEnd type="none" w="med" len="med"/>
+                      <a:tailEnd type="none" w="med" len="med"/>
+                    </a:lnR>
+                    <a:lnT w="12700" cap="flat" cmpd="sng" algn="ctr">
+                      <a:solidFill>
+                        <a:schemeClr val="tx1"/>
+                      </a:solidFill>
+                      <a:prstDash val="solid"/>
+                      <a:round/>
+                      <a:headEnd type="none" w="med" len="med"/>
+                      <a:tailEnd type="none" w="med" len="med"/>
+                    </a:lnT>
+                    <a:lnB w="12700" cap="flat" cmpd="sng" algn="ctr">
+                      <a:solidFill>
+                        <a:schemeClr val="tx1"/>
+                      </a:solidFill>
+                      <a:prstDash val="solid"/>
+                      <a:round/>
+                      <a:headEnd type="none" w="med" len="med"/>
+                      <a:tailEnd type="none" w="med" len="med"/>
+                    </a:lnB>
+                  </a:tcPr>
+                </a:tc>
+                <a:extLst>
+                  <a:ext uri="{0D108BD9-81ED-4DB2-BD59-A6C34878D82A}">
+                    <a16:rowId xmlns:a16="http://schemas.microsoft.com/office/drawing/2014/main" val="992539734"/>
+                  </a:ext>
+                </a:extLst>
+              </a:tr>
               <a:tr h="236104">
                 <a:tc vMerge="1">
                   <a:txBody>
@@ -27627,7 +27658,7 @@
                           <a:effectLst/>
                           <a:latin typeface="Instrument Sans Medium" panose="020B0604020202020204" charset="0"/>
                         </a:rPr>
-                        <a:t>Box1</a:t>
+                        <a:t>IOT</a:t>
                       </a:r>
                     </a:p>
                   </a:txBody>
@@ -34663,13 +34694,13 @@
   <p:clrMapOvr>
     <a:masterClrMapping/>
   </p:clrMapOvr>
-  <mc:AlternateContent xmlns:mc="http://schemas.openxmlformats.org/markup-compatibility/2006">
-    <mc:Choice xmlns:p159="http://schemas.microsoft.com/office/powerpoint/2015/09/main" Requires="p159">
+  <mc:AlternateContent xmlns:mc="http://schemas.openxmlformats.org/markup-compatibility/2006" xmlns:p159="http://schemas.microsoft.com/office/powerpoint/2015/09/main">
+    <mc:Choice Requires="p159">
       <p:transition xmlns:p14="http://schemas.microsoft.com/office/powerpoint/2010/main" spd="slow" p14:dur="2000">
         <p159:morph option="byObject"/>
       </p:transition>
     </mc:Choice>
-    <mc:Fallback>
+    <mc:Fallback xmlns="">
       <p:transition spd="slow">
         <p:fade/>
       </p:transition>
@@ -35819,13 +35850,13 @@
   <p:clrMapOvr>
     <a:masterClrMapping/>
   </p:clrMapOvr>
-  <mc:AlternateContent xmlns:mc="http://schemas.openxmlformats.org/markup-compatibility/2006">
-    <mc:Choice xmlns:p159="http://schemas.microsoft.com/office/powerpoint/2015/09/main" Requires="p159">
+  <mc:AlternateContent xmlns:mc="http://schemas.openxmlformats.org/markup-compatibility/2006" xmlns:p159="http://schemas.microsoft.com/office/powerpoint/2015/09/main">
+    <mc:Choice Requires="p159">
       <p:transition xmlns:p14="http://schemas.microsoft.com/office/powerpoint/2010/main" spd="slow" p14:dur="2000">
         <p159:morph option="byObject"/>
       </p:transition>
     </mc:Choice>
-    <mc:Fallback>
+    <mc:Fallback xmlns="">
       <p:transition spd="slow">
         <p:fade/>
       </p:transition>
@@ -36536,13 +36567,13 @@
   <p:clrMapOvr>
     <a:masterClrMapping/>
   </p:clrMapOvr>
-  <mc:AlternateContent xmlns:mc="http://schemas.openxmlformats.org/markup-compatibility/2006">
-    <mc:Choice xmlns:p159="http://schemas.microsoft.com/office/powerpoint/2015/09/main" Requires="p159">
+  <mc:AlternateContent xmlns:mc="http://schemas.openxmlformats.org/markup-compatibility/2006" xmlns:p159="http://schemas.microsoft.com/office/powerpoint/2015/09/main">
+    <mc:Choice Requires="p159">
       <p:transition xmlns:p14="http://schemas.microsoft.com/office/powerpoint/2010/main" spd="slow" p14:dur="2000">
         <p159:morph option="byObject"/>
       </p:transition>
     </mc:Choice>
-    <mc:Fallback>
+    <mc:Fallback xmlns="">
       <p:transition spd="slow">
         <p:fade/>
       </p:transition>
@@ -37786,13 +37817,13 @@
   <p:clrMapOvr>
     <a:masterClrMapping/>
   </p:clrMapOvr>
-  <mc:AlternateContent xmlns:mc="http://schemas.openxmlformats.org/markup-compatibility/2006">
-    <mc:Choice xmlns:p159="http://schemas.microsoft.com/office/powerpoint/2015/09/main" Requires="p159">
+  <mc:AlternateContent xmlns:mc="http://schemas.openxmlformats.org/markup-compatibility/2006" xmlns:p159="http://schemas.microsoft.com/office/powerpoint/2015/09/main">
+    <mc:Choice Requires="p159">
       <p:transition xmlns:p14="http://schemas.microsoft.com/office/powerpoint/2010/main" spd="slow" p14:dur="2000">
         <p159:morph option="byObject"/>
       </p:transition>
     </mc:Choice>
-    <mc:Fallback>
+    <mc:Fallback xmlns="">
       <p:transition spd="slow">
         <p:fade/>
       </p:transition>
@@ -38397,7 +38428,7 @@
           <p:nvPr>
             <p:extLst>
               <p:ext uri="{D42A27DB-BD31-4B8C-83A1-F6EECF244321}">
-                <p14:modId xmlns:p14="http://schemas.microsoft.com/office/powerpoint/2010/main" val="4283456591"/>
+                <p14:modId xmlns:p14="http://schemas.microsoft.com/office/powerpoint/2010/main" val="3977046774"/>
               </p:ext>
             </p:extLst>
           </p:nvPr>
@@ -38436,7 +38467,7 @@
                     <a:p>
                       <a:r>
                         <a:rPr lang="en-US" sz="1800" dirty="0"/>
-                        <a:t>Chamber</a:t>
+                        <a:t>Katona Dominik</a:t>
                       </a:r>
                       <a:endParaRPr lang="hu-HU" sz="1800" dirty="0"/>
                     </a:p>
@@ -38450,7 +38481,7 @@
                     <a:p>
                       <a:r>
                         <a:rPr lang="en-US" sz="1800" dirty="0"/>
-                        <a:t>Ádám</a:t>
+                        <a:t>Tóth Ádám</a:t>
                       </a:r>
                       <a:endParaRPr lang="hu-HU" sz="1800" dirty="0"/>
                     </a:p>
@@ -38595,7 +38626,11 @@
                     <a:bodyPr/>
                     <a:lstStyle/>
                     <a:p>
-                      <a:endParaRPr lang="hu-HU" sz="1800"/>
+                      <a:r>
+                        <a:rPr lang="en-US" sz="1800" dirty="0" err="1"/>
+                        <a:t>Szerverek</a:t>
+                      </a:r>
+                      <a:endParaRPr lang="hu-HU" sz="1800" dirty="0"/>
                     </a:p>
                   </a:txBody>
                   <a:tcPr/>
